--- a/Falcon_Portfolio_Portal_DIB_Management.pptx
+++ b/Falcon_Portfolio_Portal_DIB_Management.pptx
@@ -505,46 +505,6 @@
           <a:bodyPr/>
           <a:lstStyle/>
           <a:p>
-            <a:r>
-              <a:rPr lang="en-US"/>
-              <a:t>Purpose: introduce Falcon Portfolio Portal to DIB Management.</a:t>
-            </a:r>
-          </a:p>
-          <a:p>
-            <a:r>
-              <a:rPr lang="en-US"/>
-              <a:t>Evidence checked against the local portal source on 22 October 2026:</a:t>
-            </a:r>
-          </a:p>
-          <a:p>
-            <a:r>
-              <a:rPr lang="en-US"/>
-              <a:t>- C:\Users\Abinaya\source\GITHub\DemandFundWinAuth\DFM\DFM.Node\README.md, Business Functionality: JIRA/non-JIRA registration, weighted sizing, assigned PET decisions, send-back/resubmission, approved-PET budget lines, CAM/LPO, invoices and utilization reporting.</a:t>
-            </a:r>
-          </a:p>
-          <a:p>
-            <a:r>
-              <a:rPr lang="en-US"/>
-              <a:t>- C:\Users\Abinaya\source\GITHub\DemandFundWinAuth\DFM\DFM.Node\public\index.html: Project register, Approval queue, budget lines, invoice status/payment date and CAPEX/OPEX report metrics.</a:t>
-            </a:r>
-          </a:p>
-          <a:p>
-            <a:r>
-              <a:rPr lang="en-US"/>
-              <a:t>The lifecycle is a conceptual summary using editable shapes, not a screenshot or a claim of automated settlement. Invoice payment dates/status can be recorded; no payment execution capability is claimed.</a:t>
-            </a:r>
-          </a:p>
-          <a:p>
-            <a:r>
-              <a:rPr lang="en-US"/>
-              <a:t>PET, CAM and LPO retain the portal's labels; their expansions have not been assumed.</a:t>
-            </a:r>
-          </a:p>
-          <a:p>
-            <a:r>
-              <a:rPr lang="en-US"/>
-              <a:t>No portfolio data or quantified benefit claims are included.</a:t>
-            </a:r>
             <a:endParaRPr lang="en-AE"/>
           </a:p>
         </p:txBody>
@@ -629,46 +589,6 @@
           <a:bodyPr/>
           <a:lstStyle/>
           <a:p>
-            <a:r>
-              <a:rPr lang="en-US"/>
-              <a:t>Source evidence, checked 22 October 2026:</a:t>
-            </a:r>
-          </a:p>
-          <a:p>
-            <a:r>
-              <a:rPr lang="en-US"/>
-              <a:t>- C:\Users\Abinaya\source\GITHub\DemandFundWinAuth\DFM\DFM.Node\README.md: business functionality and authentication. Supports CSV/Excel imports with editable PET previews, attachments, assigned reviewer/approver checks and approved-PET-only creation of budget lines.</a:t>
-            </a:r>
-          </a:p>
-          <a:p>
-            <a:r>
-              <a:rPr lang="en-US"/>
-              <a:t>- C:\Users\Abinaya\source\GITHub\DemandFundWinAuth\DFM\DFM.Node\public\index.html: searchable Project register with owner and pending-action filters; Approval queue; CAPEX &amp; OPEX register; reporting utilization; workflow history; CAM/LPO and invoice documents.</a:t>
-            </a:r>
-          </a:p>
-          <a:p>
-            <a:r>
-              <a:rPr lang="en-US"/>
-              <a:t>- C:\Users\Abinaya\source\GITHub\DemandFundWinAuth\DFM\DFM.Node\deployment\USER-INSTRUCTIONS.md, Notifications: assigned review/approval events and decisions on own PETs delivered through DFM Helper. Requires the helper running, updated server/helper components and normal enrollment.</a:t>
-            </a:r>
-          </a:p>
-          <a:p>
-            <a:r>
-              <a:rPr lang="en-US"/>
-              <a:t>Financial balances are synchronized source balances, not a claim of real-time feeds. No automated payment execution or savings measurement is claimed.</a:t>
-            </a:r>
-          </a:p>
-          <a:p>
-            <a:r>
-              <a:rPr lang="en-US"/>
-              <a:t>Business benefits are qualitative management implications of the evidenced capabilities, not measured outcomes or guarantees.</a:t>
-            </a:r>
-          </a:p>
-          <a:p>
-            <a:r>
-              <a:rPr lang="en-US"/>
-              <a:t>All slide text, rows, labels and decorative graphics are native editable PowerPoint objects.</a:t>
-            </a:r>
             <a:endParaRPr lang="en-AE"/>
           </a:p>
         </p:txBody>
@@ -4399,10 +4319,10 @@
       </p:sp>
       <p:sp>
         <p:nvSpPr>
-          <p:cNvPr id="10" name="Workflow eyebrow">
-            <a:extLst>
-              <a:ext uri="{FF2B5EF4-FFF2-40B4-BE49-F238E27FC236}">
-                <a16:creationId xmlns:a16="http://schemas.microsoft.com/office/drawing/2014/main" id="{4A22BAB7-7617-33D3-C168-1ADB83FD8432}"/>
+          <p:cNvPr id="31" name="Slide one footer">
+            <a:extLst>
+              <a:ext uri="{FF2B5EF4-FFF2-40B4-BE49-F238E27FC236}">
+                <a16:creationId xmlns:a16="http://schemas.microsoft.com/office/drawing/2014/main" id="{C1820021-AA78-0120-47D2-153F4CB8AC04}"/>
               </a:ext>
             </a:extLst>
           </p:cNvPr>
@@ -4411,8 +4331,94 @@
         </p:nvSpPr>
         <p:spPr>
           <a:xfrm>
-            <a:off x="5867400" y="508000"/>
-            <a:ext cx="5715000" cy="254000"/>
+            <a:off x="5867400" y="6553200"/>
+            <a:ext cx="5207000" cy="190500"/>
+          </a:xfrm>
+          <a:prstGeom prst="rect">
+            <a:avLst/>
+          </a:prstGeom>
+          <a:noFill/>
+        </p:spPr>
+        <p:txBody>
+          <a:bodyPr vert="horz" wrap="square" lIns="0" tIns="0" rIns="0" bIns="0" rtlCol="0">
+            <a:noAutofit/>
+          </a:bodyPr>
+          <a:lstStyle/>
+          <a:p>
+            <a:r>
+              <a:rPr lang="en-IN" sz="900">
+                <a:solidFill>
+                  <a:srgbClr val="596B63"/>
+                </a:solidFill>
+                <a:latin typeface="Aptos" panose="020B0004020202020204" pitchFamily="34" charset="0"/>
+              </a:rPr>
+              <a:t>FALCON PORTFOLIO PORTAL  |  DIB</a:t>
+            </a:r>
+            <a:endParaRPr lang="en-AE" sz="900">
+              <a:solidFill>
+                <a:srgbClr val="596B63"/>
+              </a:solidFill>
+              <a:latin typeface="Aptos" panose="020B0004020202020204" pitchFamily="34" charset="0"/>
+            </a:endParaRPr>
+          </a:p>
+        </p:txBody>
+      </p:sp>
+      <p:sp>
+        <p:nvSpPr>
+          <p:cNvPr id="32" name="Slide number">
+            <a:extLst>
+              <a:ext uri="{FF2B5EF4-FFF2-40B4-BE49-F238E27FC236}">
+                <a16:creationId xmlns:a16="http://schemas.microsoft.com/office/drawing/2014/main" id="{825080F0-97BC-965F-4CA9-94EDECFA3D45}"/>
+              </a:ext>
+            </a:extLst>
+          </p:cNvPr>
+          <p:cNvSpPr txBox="1"/>
+          <p:nvPr/>
+        </p:nvSpPr>
+        <p:spPr>
+          <a:xfrm>
+            <a:off x="11226800" y="6540500"/>
+            <a:ext cx="508000" cy="203200"/>
+          </a:xfrm>
+          <a:prstGeom prst="rect">
+            <a:avLst/>
+          </a:prstGeom>
+          <a:noFill/>
+        </p:spPr>
+        <p:txBody>
+          <a:bodyPr vert="horz" wrap="square" lIns="0" tIns="0" rIns="0" bIns="0" rtlCol="0">
+            <a:noAutofit/>
+          </a:bodyPr>
+          <a:lstStyle/>
+          <a:p>
+            <a:r>
+              <a:rPr lang="en-AE" sz="1000" b="1">
+                <a:solidFill>
+                  <a:srgbClr val="0B4A36"/>
+                </a:solidFill>
+                <a:latin typeface="Aptos" panose="020B0004020202020204" pitchFamily="34" charset="0"/>
+              </a:rPr>
+              <a:t>01</a:t>
+            </a:r>
+          </a:p>
+        </p:txBody>
+      </p:sp>
+      <p:sp>
+        <p:nvSpPr>
+          <p:cNvPr id="33" name="Screenshot eyebrow">
+            <a:extLst>
+              <a:ext uri="{FF2B5EF4-FFF2-40B4-BE49-F238E27FC236}">
+                <a16:creationId xmlns:a16="http://schemas.microsoft.com/office/drawing/2014/main" id="{ACCAAB8E-0196-6EE1-A496-587E4BB56258}"/>
+              </a:ext>
+            </a:extLst>
+          </p:cNvPr>
+          <p:cNvSpPr txBox="1"/>
+          <p:nvPr/>
+        </p:nvSpPr>
+        <p:spPr>
+          <a:xfrm>
+            <a:off x="5867400" y="495300"/>
+            <a:ext cx="5588000" cy="304800"/>
           </a:xfrm>
           <a:prstGeom prst="rect">
             <a:avLst/>
@@ -4432,7 +4438,7 @@
                 </a:solidFill>
                 <a:latin typeface="Aptos" panose="020B0004020202020204" pitchFamily="34" charset="0"/>
               </a:rPr>
-              <a:t>ONE CONNECTED WORKFLOW</a:t>
+              <a:t>PORTAL INTERFACE</a:t>
             </a:r>
             <a:endParaRPr lang="en-AE" sz="1100" b="1">
               <a:solidFill>
@@ -4445,56 +4451,10 @@
       </p:sp>
       <p:sp>
         <p:nvSpPr>
-          <p:cNvPr id="11" name="Workflow title">
-            <a:extLst>
-              <a:ext uri="{FF2B5EF4-FFF2-40B4-BE49-F238E27FC236}">
-                <a16:creationId xmlns:a16="http://schemas.microsoft.com/office/drawing/2014/main" id="{1F40B93F-6610-2523-0567-4592E8487C6D}"/>
-              </a:ext>
-            </a:extLst>
-          </p:cNvPr>
-          <p:cNvSpPr txBox="1"/>
-          <p:nvPr/>
-        </p:nvSpPr>
-        <p:spPr>
-          <a:xfrm>
-            <a:off x="5867400" y="927100"/>
-            <a:ext cx="5715000" cy="457200"/>
-          </a:xfrm>
-          <a:prstGeom prst="rect">
-            <a:avLst/>
-          </a:prstGeom>
-          <a:noFill/>
-        </p:spPr>
-        <p:txBody>
-          <a:bodyPr vert="horz" wrap="square" lIns="0" tIns="0" rIns="0" bIns="0" rtlCol="0">
-            <a:noAutofit/>
-          </a:bodyPr>
-          <a:lstStyle/>
-          <a:p>
-            <a:r>
-              <a:rPr lang="en-US" sz="2300" b="1">
-                <a:solidFill>
-                  <a:srgbClr val="0B4A36"/>
-                </a:solidFill>
-                <a:latin typeface="Aptos" panose="020B0004020202020204" pitchFamily="34" charset="0"/>
-              </a:rPr>
-              <a:t>From request to financial control</a:t>
-            </a:r>
-            <a:endParaRPr lang="en-AE" sz="2300" b="1">
-              <a:solidFill>
-                <a:srgbClr val="0B4A36"/>
-              </a:solidFill>
-              <a:latin typeface="Aptos" panose="020B0004020202020204" pitchFamily="34" charset="0"/>
-            </a:endParaRPr>
-          </a:p>
-        </p:txBody>
-      </p:sp>
-      <p:sp>
-        <p:nvSpPr>
-          <p:cNvPr id="12" name="Stage 0 number background">
-            <a:extLst>
-              <a:ext uri="{FF2B5EF4-FFF2-40B4-BE49-F238E27FC236}">
-                <a16:creationId xmlns:a16="http://schemas.microsoft.com/office/drawing/2014/main" id="{FC392540-A195-CD37-B80E-BEE5AFCBA144}"/>
+          <p:cNvPr id="34" name="Screenshot frame">
+            <a:extLst>
+              <a:ext uri="{FF2B5EF4-FFF2-40B4-BE49-F238E27FC236}">
+                <a16:creationId xmlns:a16="http://schemas.microsoft.com/office/drawing/2014/main" id="{E12F8295-C113-1275-5E5F-F6A5F781AE8B}"/>
               </a:ext>
             </a:extLst>
           </p:cNvPr>
@@ -4503,8 +4463,8 @@
         </p:nvSpPr>
         <p:spPr>
           <a:xfrm>
-            <a:off x="5867400" y="1701800"/>
-            <a:ext cx="558800" cy="482600"/>
+            <a:off x="5829300" y="914400"/>
+            <a:ext cx="5943600" cy="3352800"/>
           </a:xfrm>
           <a:prstGeom prst="rect">
             <a:avLst/>
@@ -4557,12 +4517,48 @@
           </a:p>
         </p:txBody>
       </p:sp>
-      <p:sp>
-        <p:nvSpPr>
-          <p:cNvPr id="13" name="Stage 0 number">
-            <a:extLst>
-              <a:ext uri="{FF2B5EF4-FFF2-40B4-BE49-F238E27FC236}">
-                <a16:creationId xmlns:a16="http://schemas.microsoft.com/office/drawing/2014/main" id="{4BB81FF8-FA5F-5D3C-DB1D-C8FD5134E2D3}"/>
+      <p:pic>
+        <p:nvPicPr>
+          <p:cNvPr id="36" name="Falcon portal project register screenshot">
+            <a:extLst>
+              <a:ext uri="{FF2B5EF4-FFF2-40B4-BE49-F238E27FC236}">
+                <a16:creationId xmlns:a16="http://schemas.microsoft.com/office/drawing/2014/main" id="{C0BD9F5D-15DB-DA8A-12E8-0D1B18D0BCA9}"/>
+              </a:ext>
+            </a:extLst>
+          </p:cNvPr>
+          <p:cNvPicPr>
+            <a:picLocks/>
+          </p:cNvPicPr>
+          <p:nvPr/>
+        </p:nvPicPr>
+        <p:blipFill>
+          <a:blip r:embed="rId3">
+            <a:extLst>
+              <a:ext uri="{28A0092B-C50C-407E-A947-70E740481C1C}">
+                <a14:useLocalDpi xmlns:a14="http://schemas.microsoft.com/office/drawing/2010/main" val="0"/>
+              </a:ext>
+            </a:extLst>
+          </a:blip>
+          <a:stretch>
+            <a:fillRect/>
+          </a:stretch>
+        </p:blipFill>
+        <p:spPr>
+          <a:xfrm>
+            <a:off x="5892800" y="977900"/>
+            <a:ext cx="5816600" cy="3289300"/>
+          </a:xfrm>
+          <a:prstGeom prst="rect">
+            <a:avLst/>
+          </a:prstGeom>
+        </p:spPr>
+      </p:pic>
+      <p:sp>
+        <p:nvSpPr>
+          <p:cNvPr id="37" name="Screenshot caption">
+            <a:extLst>
+              <a:ext uri="{FF2B5EF4-FFF2-40B4-BE49-F238E27FC236}">
+                <a16:creationId xmlns:a16="http://schemas.microsoft.com/office/drawing/2014/main" id="{311F71A9-0B00-44A9-F863-72E471504620}"/>
               </a:ext>
             </a:extLst>
           </p:cNvPr>
@@ -4571,8 +4567,8 @@
         </p:nvSpPr>
         <p:spPr>
           <a:xfrm>
-            <a:off x="5981700" y="1803400"/>
-            <a:ext cx="355600" cy="279400"/>
+            <a:off x="5867400" y="4445000"/>
+            <a:ext cx="5715000" cy="254000"/>
           </a:xfrm>
           <a:prstGeom prst="rect">
             <a:avLst/>
@@ -4586,23 +4582,29 @@
           <a:lstStyle/>
           <a:p>
             <a:r>
-              <a:rPr lang="en-AE" sz="1500" b="1">
+              <a:rPr lang="en-IN" sz="1200" b="1">
                 <a:solidFill>
                   <a:srgbClr val="0B4A36"/>
                 </a:solidFill>
                 <a:latin typeface="Aptos" panose="020B0004020202020204" pitchFamily="34" charset="0"/>
               </a:rPr>
-              <a:t>01</a:t>
-            </a:r>
-          </a:p>
-        </p:txBody>
-      </p:sp>
-      <p:sp>
-        <p:nvSpPr>
-          <p:cNvPr id="14" name="Stage 0 title">
-            <a:extLst>
-              <a:ext uri="{FF2B5EF4-FFF2-40B4-BE49-F238E27FC236}">
-                <a16:creationId xmlns:a16="http://schemas.microsoft.com/office/drawing/2014/main" id="{11FD8AD2-14B0-763B-9F8E-82E929DA5AD5}"/>
+              <a:t>PROJECT REGISTER  |  PREVIEW DATA</a:t>
+            </a:r>
+            <a:endParaRPr lang="en-AE" sz="1200" b="1">
+              <a:solidFill>
+                <a:srgbClr val="0B4A36"/>
+              </a:solidFill>
+              <a:latin typeface="Aptos" panose="020B0004020202020204" pitchFamily="34" charset="0"/>
+            </a:endParaRPr>
+          </a:p>
+        </p:txBody>
+      </p:sp>
+      <p:sp>
+        <p:nvSpPr>
+          <p:cNvPr id="38" name="Preview data disclaimer">
+            <a:extLst>
+              <a:ext uri="{FF2B5EF4-FFF2-40B4-BE49-F238E27FC236}">
+                <a16:creationId xmlns:a16="http://schemas.microsoft.com/office/drawing/2014/main" id="{7FDBD8C0-2468-9F55-0912-5E8E45C47A1F}"/>
               </a:ext>
             </a:extLst>
           </p:cNvPr>
@@ -4611,8 +4613,8 @@
         </p:nvSpPr>
         <p:spPr>
           <a:xfrm>
-            <a:off x="6654800" y="1689100"/>
-            <a:ext cx="4978400" cy="355600"/>
+            <a:off x="5867400" y="4762500"/>
+            <a:ext cx="5715000" cy="431800"/>
           </a:xfrm>
           <a:prstGeom prst="rect">
             <a:avLst/>
@@ -4626,956 +4628,66 @@
           <a:lstStyle/>
           <a:p>
             <a:r>
-              <a:rPr lang="en-IN" b="1">
+              <a:rPr lang="en-US" sz="1100">
+                <a:solidFill>
+                  <a:srgbClr val="596B63"/>
+                </a:solidFill>
+                <a:latin typeface="Aptos" panose="020B0004020202020204" pitchFamily="34" charset="0"/>
+              </a:rPr>
+              <a:t>Illustrative portal screen; no live portfolio data is shown.</a:t>
+            </a:r>
+            <a:endParaRPr lang="en-AE" sz="1100">
+              <a:solidFill>
+                <a:srgbClr val="596B63"/>
+              </a:solidFill>
+              <a:latin typeface="Aptos" panose="020B0004020202020204" pitchFamily="34" charset="0"/>
+            </a:endParaRPr>
+          </a:p>
+        </p:txBody>
+      </p:sp>
+      <p:sp>
+        <p:nvSpPr>
+          <p:cNvPr id="39" name="Workflow summary">
+            <a:extLst>
+              <a:ext uri="{FF2B5EF4-FFF2-40B4-BE49-F238E27FC236}">
+                <a16:creationId xmlns:a16="http://schemas.microsoft.com/office/drawing/2014/main" id="{31D44895-8607-8AAD-5665-E44B349A6141}"/>
+              </a:ext>
+            </a:extLst>
+          </p:cNvPr>
+          <p:cNvSpPr txBox="1"/>
+          <p:nvPr/>
+        </p:nvSpPr>
+        <p:spPr>
+          <a:xfrm>
+            <a:off x="5867400" y="5422900"/>
+            <a:ext cx="5715000" cy="330200"/>
+          </a:xfrm>
+          <a:prstGeom prst="rect">
+            <a:avLst/>
+          </a:prstGeom>
+          <a:noFill/>
+        </p:spPr>
+        <p:txBody>
+          <a:bodyPr vert="horz" wrap="square" lIns="0" tIns="0" rIns="0" bIns="0" rtlCol="0">
+            <a:noAutofit/>
+          </a:bodyPr>
+          <a:lstStyle/>
+          <a:p>
+            <a:r>
+              <a:rPr lang="en-IN" sz="1200" b="1">
                 <a:solidFill>
                   <a:srgbClr val="0B4A36"/>
                 </a:solidFill>
                 <a:latin typeface="Aptos" panose="020B0004020202020204" pitchFamily="34" charset="0"/>
               </a:rPr>
-              <a:t>Register demand</a:t>
-            </a:r>
-            <a:endParaRPr lang="en-AE" b="1">
+              <a:t>REGISTER  &gt;  REVIEW  &gt;  TRACK SPEND</a:t>
+            </a:r>
+            <a:endParaRPr lang="en-AE" sz="1200" b="1">
               <a:solidFill>
                 <a:srgbClr val="0B4A36"/>
               </a:solidFill>
               <a:latin typeface="Aptos" panose="020B0004020202020204" pitchFamily="34" charset="0"/>
             </a:endParaRPr>
-          </a:p>
-        </p:txBody>
-      </p:sp>
-      <p:sp>
-        <p:nvSpPr>
-          <p:cNvPr id="15" name="Stage 0 detail">
-            <a:extLst>
-              <a:ext uri="{FF2B5EF4-FFF2-40B4-BE49-F238E27FC236}">
-                <a16:creationId xmlns:a16="http://schemas.microsoft.com/office/drawing/2014/main" id="{EA04A538-B00F-6658-1AB9-F1AA1EF6F070}"/>
-              </a:ext>
-            </a:extLst>
-          </p:cNvPr>
-          <p:cNvSpPr txBox="1"/>
-          <p:nvPr/>
-        </p:nvSpPr>
-        <p:spPr>
-          <a:xfrm>
-            <a:off x="6654800" y="2082800"/>
-            <a:ext cx="4978400" cy="533400"/>
-          </a:xfrm>
-          <a:prstGeom prst="rect">
-            <a:avLst/>
-          </a:prstGeom>
-          <a:noFill/>
-        </p:spPr>
-        <p:txBody>
-          <a:bodyPr vert="horz" wrap="square" lIns="0" tIns="0" rIns="0" bIns="0" rtlCol="0">
-            <a:noAutofit/>
-          </a:bodyPr>
-          <a:lstStyle/>
-          <a:p>
-            <a:r>
-              <a:rPr lang="en-US" sz="1400">
-                <a:solidFill>
-                  <a:srgbClr val="596B63"/>
-                </a:solidFill>
-                <a:latin typeface="Aptos" panose="020B0004020202020204" pitchFamily="34" charset="0"/>
-              </a:rPr>
-              <a:t>JIRA and non-JIRA projects, with sizing and ownership.</a:t>
-            </a:r>
-            <a:endParaRPr lang="en-AE" sz="1400">
-              <a:solidFill>
-                <a:srgbClr val="596B63"/>
-              </a:solidFill>
-              <a:latin typeface="Aptos" panose="020B0004020202020204" pitchFamily="34" charset="0"/>
-            </a:endParaRPr>
-          </a:p>
-        </p:txBody>
-      </p:sp>
-      <p:sp>
-        <p:nvSpPr>
-          <p:cNvPr id="16" name="Stage 0 divider">
-            <a:extLst>
-              <a:ext uri="{FF2B5EF4-FFF2-40B4-BE49-F238E27FC236}">
-                <a16:creationId xmlns:a16="http://schemas.microsoft.com/office/drawing/2014/main" id="{793F2EA0-1719-9F09-829E-71B17355AC27}"/>
-              </a:ext>
-            </a:extLst>
-          </p:cNvPr>
-          <p:cNvSpPr/>
-          <p:nvPr/>
-        </p:nvSpPr>
-        <p:spPr>
-          <a:xfrm>
-            <a:off x="6654800" y="2628900"/>
-            <a:ext cx="4978400" cy="12700"/>
-          </a:xfrm>
-          <a:prstGeom prst="rect">
-            <a:avLst/>
-          </a:prstGeom>
-          <a:solidFill>
-            <a:srgbClr val="DCE4DE"/>
-          </a:solidFill>
-          <a:ln w="19050" cap="flat" cmpd="sng" algn="ctr">
-            <a:noFill/>
-            <a:prstDash val="solid"/>
-            <a:miter lim="800000"/>
-          </a:ln>
-          <a:effectLst/>
-          <a:extLst>
-            <a:ext uri="{91240B29-F687-4F45-9708-019B960494DF}">
-              <a14:hiddenLine xmlns:a14="http://schemas.microsoft.com/office/drawing/2010/main" w="19050" cap="flat" cmpd="sng" algn="ctr">
-                <a:solidFill>
-                  <a:schemeClr val="accent1">
-                    <a:shade val="15000"/>
-                  </a:schemeClr>
-                </a:solidFill>
-                <a:prstDash val="solid"/>
-                <a:miter lim="800000"/>
-              </a14:hiddenLine>
-            </a:ext>
-          </a:extLst>
-        </p:spPr>
-        <p:style>
-          <a:lnRef idx="2">
-            <a:schemeClr val="accent1">
-              <a:shade val="15000"/>
-            </a:schemeClr>
-          </a:lnRef>
-          <a:fillRef idx="1">
-            <a:schemeClr val="accent1"/>
-          </a:fillRef>
-          <a:effectRef idx="0">
-            <a:schemeClr val="accent1"/>
-          </a:effectRef>
-          <a:fontRef idx="minor">
-            <a:schemeClr val="lt1"/>
-          </a:fontRef>
-        </p:style>
-        <p:txBody>
-          <a:bodyPr rtlCol="0" anchor="ctr"/>
-          <a:lstStyle/>
-          <a:p>
-            <a:pPr algn="ctr"/>
-            <a:endParaRPr lang="en-AE"/>
-          </a:p>
-        </p:txBody>
-      </p:sp>
-      <p:sp>
-        <p:nvSpPr>
-          <p:cNvPr id="17" name="Stage 1 number background">
-            <a:extLst>
-              <a:ext uri="{FF2B5EF4-FFF2-40B4-BE49-F238E27FC236}">
-                <a16:creationId xmlns:a16="http://schemas.microsoft.com/office/drawing/2014/main" id="{BF8483FF-9B0A-9946-5DB6-6CCC43D811B2}"/>
-              </a:ext>
-            </a:extLst>
-          </p:cNvPr>
-          <p:cNvSpPr/>
-          <p:nvPr/>
-        </p:nvSpPr>
-        <p:spPr>
-          <a:xfrm>
-            <a:off x="5867400" y="2794000"/>
-            <a:ext cx="558800" cy="482600"/>
-          </a:xfrm>
-          <a:prstGeom prst="rect">
-            <a:avLst/>
-          </a:prstGeom>
-          <a:solidFill>
-            <a:srgbClr val="F2F5F2"/>
-          </a:solidFill>
-          <a:ln w="19050" cap="flat" cmpd="sng" algn="ctr">
-            <a:noFill/>
-            <a:prstDash val="solid"/>
-            <a:miter lim="800000"/>
-          </a:ln>
-          <a:effectLst/>
-          <a:extLst>
-            <a:ext uri="{91240B29-F687-4F45-9708-019B960494DF}">
-              <a14:hiddenLine xmlns:a14="http://schemas.microsoft.com/office/drawing/2010/main" w="19050" cap="flat" cmpd="sng" algn="ctr">
-                <a:solidFill>
-                  <a:schemeClr val="accent1">
-                    <a:shade val="15000"/>
-                  </a:schemeClr>
-                </a:solidFill>
-                <a:prstDash val="solid"/>
-                <a:miter lim="800000"/>
-              </a14:hiddenLine>
-            </a:ext>
-          </a:extLst>
-        </p:spPr>
-        <p:style>
-          <a:lnRef idx="2">
-            <a:schemeClr val="accent1">
-              <a:shade val="15000"/>
-            </a:schemeClr>
-          </a:lnRef>
-          <a:fillRef idx="1">
-            <a:schemeClr val="accent1"/>
-          </a:fillRef>
-          <a:effectRef idx="0">
-            <a:schemeClr val="accent1"/>
-          </a:effectRef>
-          <a:fontRef idx="minor">
-            <a:schemeClr val="lt1"/>
-          </a:fontRef>
-        </p:style>
-        <p:txBody>
-          <a:bodyPr rtlCol="0" anchor="ctr"/>
-          <a:lstStyle/>
-          <a:p>
-            <a:pPr algn="ctr"/>
-            <a:endParaRPr lang="en-AE"/>
-          </a:p>
-        </p:txBody>
-      </p:sp>
-      <p:sp>
-        <p:nvSpPr>
-          <p:cNvPr id="18" name="Stage 1 number">
-            <a:extLst>
-              <a:ext uri="{FF2B5EF4-FFF2-40B4-BE49-F238E27FC236}">
-                <a16:creationId xmlns:a16="http://schemas.microsoft.com/office/drawing/2014/main" id="{9D8414F9-1922-BFC7-D790-EC8FE5161AB5}"/>
-              </a:ext>
-            </a:extLst>
-          </p:cNvPr>
-          <p:cNvSpPr txBox="1"/>
-          <p:nvPr/>
-        </p:nvSpPr>
-        <p:spPr>
-          <a:xfrm>
-            <a:off x="5981700" y="2895600"/>
-            <a:ext cx="355600" cy="279400"/>
-          </a:xfrm>
-          <a:prstGeom prst="rect">
-            <a:avLst/>
-          </a:prstGeom>
-          <a:noFill/>
-        </p:spPr>
-        <p:txBody>
-          <a:bodyPr vert="horz" wrap="square" lIns="0" tIns="0" rIns="0" bIns="0" rtlCol="0">
-            <a:noAutofit/>
-          </a:bodyPr>
-          <a:lstStyle/>
-          <a:p>
-            <a:r>
-              <a:rPr lang="en-AE" sz="1500" b="1">
-                <a:solidFill>
-                  <a:srgbClr val="0B4A36"/>
-                </a:solidFill>
-                <a:latin typeface="Aptos" panose="020B0004020202020204" pitchFamily="34" charset="0"/>
-              </a:rPr>
-              <a:t>02</a:t>
-            </a:r>
-          </a:p>
-        </p:txBody>
-      </p:sp>
-      <p:sp>
-        <p:nvSpPr>
-          <p:cNvPr id="19" name="Stage 1 title">
-            <a:extLst>
-              <a:ext uri="{FF2B5EF4-FFF2-40B4-BE49-F238E27FC236}">
-                <a16:creationId xmlns:a16="http://schemas.microsoft.com/office/drawing/2014/main" id="{0D5DC3C4-8C3B-48A8-A7B0-209D9A76D293}"/>
-              </a:ext>
-            </a:extLst>
-          </p:cNvPr>
-          <p:cNvSpPr txBox="1"/>
-          <p:nvPr/>
-        </p:nvSpPr>
-        <p:spPr>
-          <a:xfrm>
-            <a:off x="6654800" y="2781300"/>
-            <a:ext cx="4978400" cy="355600"/>
-          </a:xfrm>
-          <a:prstGeom prst="rect">
-            <a:avLst/>
-          </a:prstGeom>
-          <a:noFill/>
-        </p:spPr>
-        <p:txBody>
-          <a:bodyPr vert="horz" wrap="square" lIns="0" tIns="0" rIns="0" bIns="0" rtlCol="0">
-            <a:noAutofit/>
-          </a:bodyPr>
-          <a:lstStyle/>
-          <a:p>
-            <a:r>
-              <a:rPr lang="en-IN" b="1">
-                <a:solidFill>
-                  <a:srgbClr val="0B4A36"/>
-                </a:solidFill>
-                <a:latin typeface="Aptos" panose="020B0004020202020204" pitchFamily="34" charset="0"/>
-              </a:rPr>
-              <a:t>Review and approve PETs</a:t>
-            </a:r>
-            <a:endParaRPr lang="en-AE" b="1">
-              <a:solidFill>
-                <a:srgbClr val="0B4A36"/>
-              </a:solidFill>
-              <a:latin typeface="Aptos" panose="020B0004020202020204" pitchFamily="34" charset="0"/>
-            </a:endParaRPr>
-          </a:p>
-        </p:txBody>
-      </p:sp>
-      <p:sp>
-        <p:nvSpPr>
-          <p:cNvPr id="20" name="Stage 1 detail">
-            <a:extLst>
-              <a:ext uri="{FF2B5EF4-FFF2-40B4-BE49-F238E27FC236}">
-                <a16:creationId xmlns:a16="http://schemas.microsoft.com/office/drawing/2014/main" id="{DBEAAC09-492F-F36C-828C-BD2458507F8F}"/>
-              </a:ext>
-            </a:extLst>
-          </p:cNvPr>
-          <p:cNvSpPr txBox="1"/>
-          <p:nvPr/>
-        </p:nvSpPr>
-        <p:spPr>
-          <a:xfrm>
-            <a:off x="6654800" y="3175000"/>
-            <a:ext cx="4978400" cy="533400"/>
-          </a:xfrm>
-          <a:prstGeom prst="rect">
-            <a:avLst/>
-          </a:prstGeom>
-          <a:noFill/>
-        </p:spPr>
-        <p:txBody>
-          <a:bodyPr vert="horz" wrap="square" lIns="0" tIns="0" rIns="0" bIns="0" rtlCol="0">
-            <a:noAutofit/>
-          </a:bodyPr>
-          <a:lstStyle/>
-          <a:p>
-            <a:r>
-              <a:rPr lang="en-US" sz="1400">
-                <a:solidFill>
-                  <a:srgbClr val="596B63"/>
-                </a:solidFill>
-                <a:latin typeface="Aptos" panose="020B0004020202020204" pitchFamily="34" charset="0"/>
-              </a:rPr>
-              <a:t>Assigned reviewers and approvers; send-back and resubmission.</a:t>
-            </a:r>
-            <a:endParaRPr lang="en-AE" sz="1400">
-              <a:solidFill>
-                <a:srgbClr val="596B63"/>
-              </a:solidFill>
-              <a:latin typeface="Aptos" panose="020B0004020202020204" pitchFamily="34" charset="0"/>
-            </a:endParaRPr>
-          </a:p>
-        </p:txBody>
-      </p:sp>
-      <p:sp>
-        <p:nvSpPr>
-          <p:cNvPr id="21" name="Stage 1 divider">
-            <a:extLst>
-              <a:ext uri="{FF2B5EF4-FFF2-40B4-BE49-F238E27FC236}">
-                <a16:creationId xmlns:a16="http://schemas.microsoft.com/office/drawing/2014/main" id="{88E113CB-8F94-343C-4968-F76E426D4449}"/>
-              </a:ext>
-            </a:extLst>
-          </p:cNvPr>
-          <p:cNvSpPr/>
-          <p:nvPr/>
-        </p:nvSpPr>
-        <p:spPr>
-          <a:xfrm>
-            <a:off x="6654800" y="3721100"/>
-            <a:ext cx="4978400" cy="12700"/>
-          </a:xfrm>
-          <a:prstGeom prst="rect">
-            <a:avLst/>
-          </a:prstGeom>
-          <a:solidFill>
-            <a:srgbClr val="DCE4DE"/>
-          </a:solidFill>
-          <a:ln w="19050" cap="flat" cmpd="sng" algn="ctr">
-            <a:noFill/>
-            <a:prstDash val="solid"/>
-            <a:miter lim="800000"/>
-          </a:ln>
-          <a:effectLst/>
-          <a:extLst>
-            <a:ext uri="{91240B29-F687-4F45-9708-019B960494DF}">
-              <a14:hiddenLine xmlns:a14="http://schemas.microsoft.com/office/drawing/2010/main" w="19050" cap="flat" cmpd="sng" algn="ctr">
-                <a:solidFill>
-                  <a:schemeClr val="accent1">
-                    <a:shade val="15000"/>
-                  </a:schemeClr>
-                </a:solidFill>
-                <a:prstDash val="solid"/>
-                <a:miter lim="800000"/>
-              </a14:hiddenLine>
-            </a:ext>
-          </a:extLst>
-        </p:spPr>
-        <p:style>
-          <a:lnRef idx="2">
-            <a:schemeClr val="accent1">
-              <a:shade val="15000"/>
-            </a:schemeClr>
-          </a:lnRef>
-          <a:fillRef idx="1">
-            <a:schemeClr val="accent1"/>
-          </a:fillRef>
-          <a:effectRef idx="0">
-            <a:schemeClr val="accent1"/>
-          </a:effectRef>
-          <a:fontRef idx="minor">
-            <a:schemeClr val="lt1"/>
-          </a:fontRef>
-        </p:style>
-        <p:txBody>
-          <a:bodyPr rtlCol="0" anchor="ctr"/>
-          <a:lstStyle/>
-          <a:p>
-            <a:pPr algn="ctr"/>
-            <a:endParaRPr lang="en-AE"/>
-          </a:p>
-        </p:txBody>
-      </p:sp>
-      <p:sp>
-        <p:nvSpPr>
-          <p:cNvPr id="22" name="Stage 2 number background">
-            <a:extLst>
-              <a:ext uri="{FF2B5EF4-FFF2-40B4-BE49-F238E27FC236}">
-                <a16:creationId xmlns:a16="http://schemas.microsoft.com/office/drawing/2014/main" id="{8C3271C1-97F6-ADBC-2E56-259F95BF1649}"/>
-              </a:ext>
-            </a:extLst>
-          </p:cNvPr>
-          <p:cNvSpPr/>
-          <p:nvPr/>
-        </p:nvSpPr>
-        <p:spPr>
-          <a:xfrm>
-            <a:off x="5867400" y="3886200"/>
-            <a:ext cx="558800" cy="482600"/>
-          </a:xfrm>
-          <a:prstGeom prst="rect">
-            <a:avLst/>
-          </a:prstGeom>
-          <a:solidFill>
-            <a:srgbClr val="F2F5F2"/>
-          </a:solidFill>
-          <a:ln w="19050" cap="flat" cmpd="sng" algn="ctr">
-            <a:noFill/>
-            <a:prstDash val="solid"/>
-            <a:miter lim="800000"/>
-          </a:ln>
-          <a:effectLst/>
-          <a:extLst>
-            <a:ext uri="{91240B29-F687-4F45-9708-019B960494DF}">
-              <a14:hiddenLine xmlns:a14="http://schemas.microsoft.com/office/drawing/2010/main" w="19050" cap="flat" cmpd="sng" algn="ctr">
-                <a:solidFill>
-                  <a:schemeClr val="accent1">
-                    <a:shade val="15000"/>
-                  </a:schemeClr>
-                </a:solidFill>
-                <a:prstDash val="solid"/>
-                <a:miter lim="800000"/>
-              </a14:hiddenLine>
-            </a:ext>
-          </a:extLst>
-        </p:spPr>
-        <p:style>
-          <a:lnRef idx="2">
-            <a:schemeClr val="accent1">
-              <a:shade val="15000"/>
-            </a:schemeClr>
-          </a:lnRef>
-          <a:fillRef idx="1">
-            <a:schemeClr val="accent1"/>
-          </a:fillRef>
-          <a:effectRef idx="0">
-            <a:schemeClr val="accent1"/>
-          </a:effectRef>
-          <a:fontRef idx="minor">
-            <a:schemeClr val="lt1"/>
-          </a:fontRef>
-        </p:style>
-        <p:txBody>
-          <a:bodyPr rtlCol="0" anchor="ctr"/>
-          <a:lstStyle/>
-          <a:p>
-            <a:pPr algn="ctr"/>
-            <a:endParaRPr lang="en-AE"/>
-          </a:p>
-        </p:txBody>
-      </p:sp>
-      <p:sp>
-        <p:nvSpPr>
-          <p:cNvPr id="23" name="Stage 2 number">
-            <a:extLst>
-              <a:ext uri="{FF2B5EF4-FFF2-40B4-BE49-F238E27FC236}">
-                <a16:creationId xmlns:a16="http://schemas.microsoft.com/office/drawing/2014/main" id="{BE85D7ED-B6AA-5355-6B8A-95DF2DA5A254}"/>
-              </a:ext>
-            </a:extLst>
-          </p:cNvPr>
-          <p:cNvSpPr txBox="1"/>
-          <p:nvPr/>
-        </p:nvSpPr>
-        <p:spPr>
-          <a:xfrm>
-            <a:off x="5981700" y="3987800"/>
-            <a:ext cx="355600" cy="279400"/>
-          </a:xfrm>
-          <a:prstGeom prst="rect">
-            <a:avLst/>
-          </a:prstGeom>
-          <a:noFill/>
-        </p:spPr>
-        <p:txBody>
-          <a:bodyPr vert="horz" wrap="square" lIns="0" tIns="0" rIns="0" bIns="0" rtlCol="0">
-            <a:noAutofit/>
-          </a:bodyPr>
-          <a:lstStyle/>
-          <a:p>
-            <a:r>
-              <a:rPr lang="en-AE" sz="1500" b="1">
-                <a:solidFill>
-                  <a:srgbClr val="0B4A36"/>
-                </a:solidFill>
-                <a:latin typeface="Aptos" panose="020B0004020202020204" pitchFamily="34" charset="0"/>
-              </a:rPr>
-              <a:t>03</a:t>
-            </a:r>
-          </a:p>
-        </p:txBody>
-      </p:sp>
-      <p:sp>
-        <p:nvSpPr>
-          <p:cNvPr id="24" name="Stage 2 title">
-            <a:extLst>
-              <a:ext uri="{FF2B5EF4-FFF2-40B4-BE49-F238E27FC236}">
-                <a16:creationId xmlns:a16="http://schemas.microsoft.com/office/drawing/2014/main" id="{1123E576-B94D-5FAA-859A-9F0A39FA06C4}"/>
-              </a:ext>
-            </a:extLst>
-          </p:cNvPr>
-          <p:cNvSpPr txBox="1"/>
-          <p:nvPr/>
-        </p:nvSpPr>
-        <p:spPr>
-          <a:xfrm>
-            <a:off x="6654800" y="3873500"/>
-            <a:ext cx="4978400" cy="355600"/>
-          </a:xfrm>
-          <a:prstGeom prst="rect">
-            <a:avLst/>
-          </a:prstGeom>
-          <a:noFill/>
-        </p:spPr>
-        <p:txBody>
-          <a:bodyPr vert="horz" wrap="square" lIns="0" tIns="0" rIns="0" bIns="0" rtlCol="0">
-            <a:noAutofit/>
-          </a:bodyPr>
-          <a:lstStyle/>
-          <a:p>
-            <a:r>
-              <a:rPr lang="en-IN" b="1">
-                <a:solidFill>
-                  <a:srgbClr val="0B4A36"/>
-                </a:solidFill>
-                <a:latin typeface="Aptos" panose="020B0004020202020204" pitchFamily="34" charset="0"/>
-              </a:rPr>
-              <a:t>Link budgets to spend</a:t>
-            </a:r>
-            <a:endParaRPr lang="en-AE" b="1">
-              <a:solidFill>
-                <a:srgbClr val="0B4A36"/>
-              </a:solidFill>
-              <a:latin typeface="Aptos" panose="020B0004020202020204" pitchFamily="34" charset="0"/>
-            </a:endParaRPr>
-          </a:p>
-        </p:txBody>
-      </p:sp>
-      <p:sp>
-        <p:nvSpPr>
-          <p:cNvPr id="25" name="Stage 2 detail">
-            <a:extLst>
-              <a:ext uri="{FF2B5EF4-FFF2-40B4-BE49-F238E27FC236}">
-                <a16:creationId xmlns:a16="http://schemas.microsoft.com/office/drawing/2014/main" id="{48FB4AF4-4C00-0B99-D69A-D70D41F012FA}"/>
-              </a:ext>
-            </a:extLst>
-          </p:cNvPr>
-          <p:cNvSpPr txBox="1"/>
-          <p:nvPr/>
-        </p:nvSpPr>
-        <p:spPr>
-          <a:xfrm>
-            <a:off x="6654800" y="4267200"/>
-            <a:ext cx="4978400" cy="533400"/>
-          </a:xfrm>
-          <a:prstGeom prst="rect">
-            <a:avLst/>
-          </a:prstGeom>
-          <a:noFill/>
-        </p:spPr>
-        <p:txBody>
-          <a:bodyPr vert="horz" wrap="square" lIns="0" tIns="0" rIns="0" bIns="0" rtlCol="0">
-            <a:noAutofit/>
-          </a:bodyPr>
-          <a:lstStyle/>
-          <a:p>
-            <a:r>
-              <a:rPr lang="en-US" sz="1400">
-                <a:solidFill>
-                  <a:srgbClr val="596B63"/>
-                </a:solidFill>
-                <a:latin typeface="Aptos" panose="020B0004020202020204" pitchFamily="34" charset="0"/>
-              </a:rPr>
-              <a:t>Approved-PET budget lines with CAM / LPO tracking.</a:t>
-            </a:r>
-            <a:endParaRPr lang="en-AE" sz="1400">
-              <a:solidFill>
-                <a:srgbClr val="596B63"/>
-              </a:solidFill>
-              <a:latin typeface="Aptos" panose="020B0004020202020204" pitchFamily="34" charset="0"/>
-            </a:endParaRPr>
-          </a:p>
-        </p:txBody>
-      </p:sp>
-      <p:sp>
-        <p:nvSpPr>
-          <p:cNvPr id="26" name="Stage 2 divider">
-            <a:extLst>
-              <a:ext uri="{FF2B5EF4-FFF2-40B4-BE49-F238E27FC236}">
-                <a16:creationId xmlns:a16="http://schemas.microsoft.com/office/drawing/2014/main" id="{7DE0D9FF-14A9-B7DA-6301-DB5A0C5B246C}"/>
-              </a:ext>
-            </a:extLst>
-          </p:cNvPr>
-          <p:cNvSpPr/>
-          <p:nvPr/>
-        </p:nvSpPr>
-        <p:spPr>
-          <a:xfrm>
-            <a:off x="6654800" y="4813300"/>
-            <a:ext cx="4978400" cy="12700"/>
-          </a:xfrm>
-          <a:prstGeom prst="rect">
-            <a:avLst/>
-          </a:prstGeom>
-          <a:solidFill>
-            <a:srgbClr val="DCE4DE"/>
-          </a:solidFill>
-          <a:ln w="19050" cap="flat" cmpd="sng" algn="ctr">
-            <a:noFill/>
-            <a:prstDash val="solid"/>
-            <a:miter lim="800000"/>
-          </a:ln>
-          <a:effectLst/>
-          <a:extLst>
-            <a:ext uri="{91240B29-F687-4F45-9708-019B960494DF}">
-              <a14:hiddenLine xmlns:a14="http://schemas.microsoft.com/office/drawing/2010/main" w="19050" cap="flat" cmpd="sng" algn="ctr">
-                <a:solidFill>
-                  <a:schemeClr val="accent1">
-                    <a:shade val="15000"/>
-                  </a:schemeClr>
-                </a:solidFill>
-                <a:prstDash val="solid"/>
-                <a:miter lim="800000"/>
-              </a14:hiddenLine>
-            </a:ext>
-          </a:extLst>
-        </p:spPr>
-        <p:style>
-          <a:lnRef idx="2">
-            <a:schemeClr val="accent1">
-              <a:shade val="15000"/>
-            </a:schemeClr>
-          </a:lnRef>
-          <a:fillRef idx="1">
-            <a:schemeClr val="accent1"/>
-          </a:fillRef>
-          <a:effectRef idx="0">
-            <a:schemeClr val="accent1"/>
-          </a:effectRef>
-          <a:fontRef idx="minor">
-            <a:schemeClr val="lt1"/>
-          </a:fontRef>
-        </p:style>
-        <p:txBody>
-          <a:bodyPr rtlCol="0" anchor="ctr"/>
-          <a:lstStyle/>
-          <a:p>
-            <a:pPr algn="ctr"/>
-            <a:endParaRPr lang="en-AE"/>
-          </a:p>
-        </p:txBody>
-      </p:sp>
-      <p:sp>
-        <p:nvSpPr>
-          <p:cNvPr id="27" name="Stage 3 number background">
-            <a:extLst>
-              <a:ext uri="{FF2B5EF4-FFF2-40B4-BE49-F238E27FC236}">
-                <a16:creationId xmlns:a16="http://schemas.microsoft.com/office/drawing/2014/main" id="{1A4635BE-A9BB-6D8E-F085-DC087F3E4F02}"/>
-              </a:ext>
-            </a:extLst>
-          </p:cNvPr>
-          <p:cNvSpPr/>
-          <p:nvPr/>
-        </p:nvSpPr>
-        <p:spPr>
-          <a:xfrm>
-            <a:off x="5867400" y="4978400"/>
-            <a:ext cx="558800" cy="482600"/>
-          </a:xfrm>
-          <a:prstGeom prst="rect">
-            <a:avLst/>
-          </a:prstGeom>
-          <a:solidFill>
-            <a:srgbClr val="F2F5F2"/>
-          </a:solidFill>
-          <a:ln w="19050" cap="flat" cmpd="sng" algn="ctr">
-            <a:noFill/>
-            <a:prstDash val="solid"/>
-            <a:miter lim="800000"/>
-          </a:ln>
-          <a:effectLst/>
-          <a:extLst>
-            <a:ext uri="{91240B29-F687-4F45-9708-019B960494DF}">
-              <a14:hiddenLine xmlns:a14="http://schemas.microsoft.com/office/drawing/2010/main" w="19050" cap="flat" cmpd="sng" algn="ctr">
-                <a:solidFill>
-                  <a:schemeClr val="accent1">
-                    <a:shade val="15000"/>
-                  </a:schemeClr>
-                </a:solidFill>
-                <a:prstDash val="solid"/>
-                <a:miter lim="800000"/>
-              </a14:hiddenLine>
-            </a:ext>
-          </a:extLst>
-        </p:spPr>
-        <p:style>
-          <a:lnRef idx="2">
-            <a:schemeClr val="accent1">
-              <a:shade val="15000"/>
-            </a:schemeClr>
-          </a:lnRef>
-          <a:fillRef idx="1">
-            <a:schemeClr val="accent1"/>
-          </a:fillRef>
-          <a:effectRef idx="0">
-            <a:schemeClr val="accent1"/>
-          </a:effectRef>
-          <a:fontRef idx="minor">
-            <a:schemeClr val="lt1"/>
-          </a:fontRef>
-        </p:style>
-        <p:txBody>
-          <a:bodyPr rtlCol="0" anchor="ctr"/>
-          <a:lstStyle/>
-          <a:p>
-            <a:pPr algn="ctr"/>
-            <a:endParaRPr lang="en-AE"/>
-          </a:p>
-        </p:txBody>
-      </p:sp>
-      <p:sp>
-        <p:nvSpPr>
-          <p:cNvPr id="28" name="Stage 3 number">
-            <a:extLst>
-              <a:ext uri="{FF2B5EF4-FFF2-40B4-BE49-F238E27FC236}">
-                <a16:creationId xmlns:a16="http://schemas.microsoft.com/office/drawing/2014/main" id="{C4F79307-2A29-AD28-E8D3-D50C6E11EE4A}"/>
-              </a:ext>
-            </a:extLst>
-          </p:cNvPr>
-          <p:cNvSpPr txBox="1"/>
-          <p:nvPr/>
-        </p:nvSpPr>
-        <p:spPr>
-          <a:xfrm>
-            <a:off x="5981700" y="5080000"/>
-            <a:ext cx="355600" cy="279400"/>
-          </a:xfrm>
-          <a:prstGeom prst="rect">
-            <a:avLst/>
-          </a:prstGeom>
-          <a:noFill/>
-        </p:spPr>
-        <p:txBody>
-          <a:bodyPr vert="horz" wrap="square" lIns="0" tIns="0" rIns="0" bIns="0" rtlCol="0">
-            <a:noAutofit/>
-          </a:bodyPr>
-          <a:lstStyle/>
-          <a:p>
-            <a:r>
-              <a:rPr lang="en-AE" sz="1500" b="1">
-                <a:solidFill>
-                  <a:srgbClr val="0B4A36"/>
-                </a:solidFill>
-                <a:latin typeface="Aptos" panose="020B0004020202020204" pitchFamily="34" charset="0"/>
-              </a:rPr>
-              <a:t>04</a:t>
-            </a:r>
-          </a:p>
-        </p:txBody>
-      </p:sp>
-      <p:sp>
-        <p:nvSpPr>
-          <p:cNvPr id="29" name="Stage 3 title">
-            <a:extLst>
-              <a:ext uri="{FF2B5EF4-FFF2-40B4-BE49-F238E27FC236}">
-                <a16:creationId xmlns:a16="http://schemas.microsoft.com/office/drawing/2014/main" id="{09697517-5AA9-A3C0-2F76-C81F086196AE}"/>
-              </a:ext>
-            </a:extLst>
-          </p:cNvPr>
-          <p:cNvSpPr txBox="1"/>
-          <p:nvPr/>
-        </p:nvSpPr>
-        <p:spPr>
-          <a:xfrm>
-            <a:off x="6654800" y="4965700"/>
-            <a:ext cx="4978400" cy="355600"/>
-          </a:xfrm>
-          <a:prstGeom prst="rect">
-            <a:avLst/>
-          </a:prstGeom>
-          <a:noFill/>
-        </p:spPr>
-        <p:txBody>
-          <a:bodyPr vert="horz" wrap="square" lIns="0" tIns="0" rIns="0" bIns="0" rtlCol="0">
-            <a:noAutofit/>
-          </a:bodyPr>
-          <a:lstStyle/>
-          <a:p>
-            <a:r>
-              <a:rPr lang="en-IN" b="1">
-                <a:solidFill>
-                  <a:srgbClr val="0B4A36"/>
-                </a:solidFill>
-                <a:latin typeface="Aptos" panose="020B0004020202020204" pitchFamily="34" charset="0"/>
-              </a:rPr>
-              <a:t>Track invoices and utilization</a:t>
-            </a:r>
-            <a:endParaRPr lang="en-AE" b="1">
-              <a:solidFill>
-                <a:srgbClr val="0B4A36"/>
-              </a:solidFill>
-              <a:latin typeface="Aptos" panose="020B0004020202020204" pitchFamily="34" charset="0"/>
-            </a:endParaRPr>
-          </a:p>
-        </p:txBody>
-      </p:sp>
-      <p:sp>
-        <p:nvSpPr>
-          <p:cNvPr id="30" name="Stage 3 detail">
-            <a:extLst>
-              <a:ext uri="{FF2B5EF4-FFF2-40B4-BE49-F238E27FC236}">
-                <a16:creationId xmlns:a16="http://schemas.microsoft.com/office/drawing/2014/main" id="{FFAD6395-C7DA-116F-A5BD-DD6864B91E24}"/>
-              </a:ext>
-            </a:extLst>
-          </p:cNvPr>
-          <p:cNvSpPr txBox="1"/>
-          <p:nvPr/>
-        </p:nvSpPr>
-        <p:spPr>
-          <a:xfrm>
-            <a:off x="6654800" y="5359400"/>
-            <a:ext cx="4978400" cy="533400"/>
-          </a:xfrm>
-          <a:prstGeom prst="rect">
-            <a:avLst/>
-          </a:prstGeom>
-          <a:noFill/>
-        </p:spPr>
-        <p:txBody>
-          <a:bodyPr vert="horz" wrap="square" lIns="0" tIns="0" rIns="0" bIns="0" rtlCol="0">
-            <a:noAutofit/>
-          </a:bodyPr>
-          <a:lstStyle/>
-          <a:p>
-            <a:r>
-              <a:rPr lang="en-US" sz="1400">
-                <a:solidFill>
-                  <a:srgbClr val="596B63"/>
-                </a:solidFill>
-                <a:latin typeface="Aptos" panose="020B0004020202020204" pitchFamily="34" charset="0"/>
-              </a:rPr>
-              <a:t>Invoice status, payment dates and CAPEX / OPEX reporting.</a:t>
-            </a:r>
-            <a:endParaRPr lang="en-AE" sz="1400">
-              <a:solidFill>
-                <a:srgbClr val="596B63"/>
-              </a:solidFill>
-              <a:latin typeface="Aptos" panose="020B0004020202020204" pitchFamily="34" charset="0"/>
-            </a:endParaRPr>
-          </a:p>
-        </p:txBody>
-      </p:sp>
-      <p:sp>
-        <p:nvSpPr>
-          <p:cNvPr id="31" name="Slide one footer">
-            <a:extLst>
-              <a:ext uri="{FF2B5EF4-FFF2-40B4-BE49-F238E27FC236}">
-                <a16:creationId xmlns:a16="http://schemas.microsoft.com/office/drawing/2014/main" id="{C1820021-AA78-0120-47D2-153F4CB8AC04}"/>
-              </a:ext>
-            </a:extLst>
-          </p:cNvPr>
-          <p:cNvSpPr txBox="1"/>
-          <p:nvPr/>
-        </p:nvSpPr>
-        <p:spPr>
-          <a:xfrm>
-            <a:off x="5867400" y="6553200"/>
-            <a:ext cx="5207000" cy="190500"/>
-          </a:xfrm>
-          <a:prstGeom prst="rect">
-            <a:avLst/>
-          </a:prstGeom>
-          <a:noFill/>
-        </p:spPr>
-        <p:txBody>
-          <a:bodyPr vert="horz" wrap="square" lIns="0" tIns="0" rIns="0" bIns="0" rtlCol="0">
-            <a:noAutofit/>
-          </a:bodyPr>
-          <a:lstStyle/>
-          <a:p>
-            <a:r>
-              <a:rPr lang="en-IN" sz="900">
-                <a:solidFill>
-                  <a:srgbClr val="596B63"/>
-                </a:solidFill>
-                <a:latin typeface="Aptos" panose="020B0004020202020204" pitchFamily="34" charset="0"/>
-              </a:rPr>
-              <a:t>FALCON PORTFOLIO PORTAL  |  DIB</a:t>
-            </a:r>
-            <a:endParaRPr lang="en-AE" sz="900">
-              <a:solidFill>
-                <a:srgbClr val="596B63"/>
-              </a:solidFill>
-              <a:latin typeface="Aptos" panose="020B0004020202020204" pitchFamily="34" charset="0"/>
-            </a:endParaRPr>
-          </a:p>
-        </p:txBody>
-      </p:sp>
-      <p:sp>
-        <p:nvSpPr>
-          <p:cNvPr id="32" name="Slide number">
-            <a:extLst>
-              <a:ext uri="{FF2B5EF4-FFF2-40B4-BE49-F238E27FC236}">
-                <a16:creationId xmlns:a16="http://schemas.microsoft.com/office/drawing/2014/main" id="{825080F0-97BC-965F-4CA9-94EDECFA3D45}"/>
-              </a:ext>
-            </a:extLst>
-          </p:cNvPr>
-          <p:cNvSpPr txBox="1"/>
-          <p:nvPr/>
-        </p:nvSpPr>
-        <p:spPr>
-          <a:xfrm>
-            <a:off x="11226800" y="6540500"/>
-            <a:ext cx="508000" cy="203200"/>
-          </a:xfrm>
-          <a:prstGeom prst="rect">
-            <a:avLst/>
-          </a:prstGeom>
-          <a:noFill/>
-        </p:spPr>
-        <p:txBody>
-          <a:bodyPr vert="horz" wrap="square" lIns="0" tIns="0" rIns="0" bIns="0" rtlCol="0">
-            <a:noAutofit/>
-          </a:bodyPr>
-          <a:lstStyle/>
-          <a:p>
-            <a:r>
-              <a:rPr lang="en-AE" sz="1000" b="1">
-                <a:solidFill>
-                  <a:srgbClr val="0B4A36"/>
-                </a:solidFill>
-                <a:latin typeface="Aptos" panose="020B0004020202020204" pitchFamily="34" charset="0"/>
-              </a:rPr>
-              <a:t>01</a:t>
-            </a:r>
           </a:p>
         </p:txBody>
       </p:sp>
